--- a/13-Presentations/PPTX/SIRAJ_Presentation-Template_AR_v1.0.pptx
+++ b/13-Presentations/PPTX/SIRAJ_Presentation-Template_AR_v1.0.pptx
@@ -5790,7 +5790,7 @@
                 <a:latin typeface="Tajawal"/>
                 <a:cs typeface="Tajawal"/>
               </a:rPr>
-              <a:t>الخوير، مسقط   ◆   +968 2400 0000   ◆   info@sirajproperties.net   ◆   sirajproperties.net</a:t>
+              <a:t>الخوير، مسقط   ◆   +968 2400 0000   ◆   info@SIRAJPROPERTIES.net   ◆   sirajproperties.net</a:t>
             </a:r>
           </a:p>
         </p:txBody>

--- a/13-Presentations/PPTX/SIRAJ_Presentation-Template_AR_v1.0.pptx
+++ b/13-Presentations/PPTX/SIRAJ_Presentation-Template_AR_v1.0.pptx
@@ -5790,7 +5790,7 @@
                 <a:latin typeface="Tajawal"/>
                 <a:cs typeface="Tajawal"/>
               </a:rPr>
-              <a:t>الخوير، مسقط   ◆   +968 2400 0000   ◆   info@SIRAJPROPERTIES.net   ◆   sirajproperties.net</a:t>
+              <a:t>الخوير، مسقط   ◆   +968 2400 0000   ◆   info@sirajproperties.net   ◆   sirajproperties.net</a:t>
             </a:r>
           </a:p>
         </p:txBody>
